--- a/probability_and_statistics/3_probability/probability-2-Rules-2-conditional.pptx
+++ b/probability_and_statistics/3_probability/probability-2-Rules-2-conditional.pptx
@@ -229,7 +229,7 @@
           <a:p>
             <a:fld id="{7BAEECA8-D063-486F-AE31-5020270C1449}" type="datetimeFigureOut">
               <a:rPr lang="en-US" smtClean="0"/>
-              <a:t>2/28/2026</a:t>
+              <a:t>4/29/2026</a:t>
             </a:fld>
             <a:endParaRPr lang="en-US"/>
           </a:p>
@@ -406,7 +406,7 @@
           <a:p>
             <a:fld id="{22B04693-6424-47C2-B763-AEA4CC3DEB22}" type="datetimeFigureOut">
               <a:rPr lang="en-US" smtClean="0"/>
-              <a:t>2/28/2026</a:t>
+              <a:t>4/29/2026</a:t>
             </a:fld>
             <a:endParaRPr lang="en-US"/>
           </a:p>
@@ -820,7 +820,7 @@
           <a:p>
             <a:fld id="{6383FAE1-13DE-4511-8C1B-C8AFB720664C}" type="datetimeFigureOut">
               <a:rPr lang="en-US" smtClean="0"/>
-              <a:t>2/28/2026</a:t>
+              <a:t>4/29/2026</a:t>
             </a:fld>
             <a:endParaRPr lang="en-US"/>
           </a:p>
@@ -1018,7 +1018,7 @@
           <a:p>
             <a:fld id="{6383FAE1-13DE-4511-8C1B-C8AFB720664C}" type="datetimeFigureOut">
               <a:rPr lang="en-US" smtClean="0"/>
-              <a:t>2/28/2026</a:t>
+              <a:t>4/29/2026</a:t>
             </a:fld>
             <a:endParaRPr lang="en-US"/>
           </a:p>
@@ -1226,7 +1226,7 @@
           <a:p>
             <a:fld id="{6383FAE1-13DE-4511-8C1B-C8AFB720664C}" type="datetimeFigureOut">
               <a:rPr lang="en-US" smtClean="0"/>
-              <a:t>2/28/2026</a:t>
+              <a:t>4/29/2026</a:t>
             </a:fld>
             <a:endParaRPr lang="en-US"/>
           </a:p>
@@ -1424,7 +1424,7 @@
           <a:p>
             <a:fld id="{6383FAE1-13DE-4511-8C1B-C8AFB720664C}" type="datetimeFigureOut">
               <a:rPr lang="en-US" smtClean="0"/>
-              <a:t>2/28/2026</a:t>
+              <a:t>4/29/2026</a:t>
             </a:fld>
             <a:endParaRPr lang="en-US"/>
           </a:p>
@@ -1699,7 +1699,7 @@
           <a:p>
             <a:fld id="{6383FAE1-13DE-4511-8C1B-C8AFB720664C}" type="datetimeFigureOut">
               <a:rPr lang="en-US" smtClean="0"/>
-              <a:t>2/28/2026</a:t>
+              <a:t>4/29/2026</a:t>
             </a:fld>
             <a:endParaRPr lang="en-US"/>
           </a:p>
@@ -1964,7 +1964,7 @@
           <a:p>
             <a:fld id="{6383FAE1-13DE-4511-8C1B-C8AFB720664C}" type="datetimeFigureOut">
               <a:rPr lang="en-US" smtClean="0"/>
-              <a:t>2/28/2026</a:t>
+              <a:t>4/29/2026</a:t>
             </a:fld>
             <a:endParaRPr lang="en-US"/>
           </a:p>
@@ -2376,7 +2376,7 @@
           <a:p>
             <a:fld id="{6383FAE1-13DE-4511-8C1B-C8AFB720664C}" type="datetimeFigureOut">
               <a:rPr lang="en-US" smtClean="0"/>
-              <a:t>2/28/2026</a:t>
+              <a:t>4/29/2026</a:t>
             </a:fld>
             <a:endParaRPr lang="en-US"/>
           </a:p>
@@ -2517,7 +2517,7 @@
           <a:p>
             <a:fld id="{6383FAE1-13DE-4511-8C1B-C8AFB720664C}" type="datetimeFigureOut">
               <a:rPr lang="en-US" smtClean="0"/>
-              <a:t>2/28/2026</a:t>
+              <a:t>4/29/2026</a:t>
             </a:fld>
             <a:endParaRPr lang="en-US"/>
           </a:p>
@@ -2630,7 +2630,7 @@
           <a:p>
             <a:fld id="{6383FAE1-13DE-4511-8C1B-C8AFB720664C}" type="datetimeFigureOut">
               <a:rPr lang="en-US" smtClean="0"/>
-              <a:t>2/28/2026</a:t>
+              <a:t>4/29/2026</a:t>
             </a:fld>
             <a:endParaRPr lang="en-US"/>
           </a:p>
@@ -2941,7 +2941,7 @@
           <a:p>
             <a:fld id="{6383FAE1-13DE-4511-8C1B-C8AFB720664C}" type="datetimeFigureOut">
               <a:rPr lang="en-US" smtClean="0"/>
-              <a:t>2/28/2026</a:t>
+              <a:t>4/29/2026</a:t>
             </a:fld>
             <a:endParaRPr lang="en-US"/>
           </a:p>
@@ -3232,7 +3232,7 @@
           <a:p>
             <a:fld id="{6383FAE1-13DE-4511-8C1B-C8AFB720664C}" type="datetimeFigureOut">
               <a:rPr lang="en-US" smtClean="0"/>
-              <a:t>2/28/2026</a:t>
+              <a:t>4/29/2026</a:t>
             </a:fld>
             <a:endParaRPr lang="en-US"/>
           </a:p>
@@ -3476,7 +3476,7 @@
           <a:p>
             <a:fld id="{6383FAE1-13DE-4511-8C1B-C8AFB720664C}" type="datetimeFigureOut">
               <a:rPr lang="en-US" smtClean="0"/>
-              <a:t>2/28/2026</a:t>
+              <a:t>4/29/2026</a:t>
             </a:fld>
             <a:endParaRPr lang="en-US"/>
           </a:p>
@@ -4093,7 +4093,7 @@
         <p:spPr>
           <a:xfrm>
             <a:off x="265176" y="880700"/>
-            <a:ext cx="8649089" cy="2308324"/>
+            <a:ext cx="8649089" cy="3785652"/>
           </a:xfrm>
           <a:prstGeom prst="rect">
             <a:avLst/>
@@ -4107,7 +4107,7 @@
           <a:lstStyle/>
           <a:p>
             <a:r>
-              <a:rPr lang="en-US" b="1" dirty="0">
+              <a:rPr lang="en-US" sz="2400" b="1" dirty="0">
                 <a:solidFill>
                   <a:schemeClr val="accent6">
                     <a:lumMod val="60000"/>
@@ -4118,20 +4118,33 @@
               <a:t>Problem</a:t>
             </a:r>
             <a:r>
-              <a:rPr lang="en-US" dirty="0">
-                <a:solidFill>
-                  <a:schemeClr val="accent6">
-                    <a:lumMod val="60000"/>
-                    <a:lumOff val="40000"/>
-                  </a:schemeClr>
-                </a:solidFill>
-              </a:rPr>
-              <a:t>: You roll a standard six-sided die. Your outcome are {1, 2, 3, 4, 5, 6}</a:t>
-            </a:r>
-          </a:p>
-          <a:p>
-            <a:r>
-              <a:rPr lang="en-US" dirty="0">
+              <a:rPr lang="en-US" sz="2400" dirty="0">
+                <a:solidFill>
+                  <a:schemeClr val="accent6">
+                    <a:lumMod val="60000"/>
+                    <a:lumOff val="40000"/>
+                  </a:schemeClr>
+                </a:solidFill>
+              </a:rPr>
+              <a:t>: You roll a standard six-sided die. Your outcome are </a:t>
+            </a:r>
+          </a:p>
+          <a:p>
+            <a:r>
+              <a:rPr lang="en-US" sz="2400" dirty="0">
+                <a:solidFill>
+                  <a:schemeClr val="accent6">
+                    <a:lumMod val="60000"/>
+                    <a:lumOff val="40000"/>
+                  </a:schemeClr>
+                </a:solidFill>
+              </a:rPr>
+              <a:t>{1, 2, 3, 4, 5, 6}</a:t>
+            </a:r>
+          </a:p>
+          <a:p>
+            <a:r>
+              <a:rPr lang="en-US" sz="2400" dirty="0">
                 <a:solidFill>
                   <a:schemeClr val="accent6">
                     <a:lumMod val="60000"/>
@@ -4144,7 +4157,7 @@
           </a:p>
           <a:p>
             <a:r>
-              <a:rPr lang="en-US" dirty="0">
+              <a:rPr lang="en-US" sz="2400" dirty="0">
                 <a:solidFill>
                   <a:schemeClr val="accent6">
                     <a:lumMod val="60000"/>
@@ -4155,7 +4168,7 @@
               <a:t>2) what is the probability of rolling a 5, </a:t>
             </a:r>
             <a:r>
-              <a:rPr lang="en-US" b="1" dirty="0">
+              <a:rPr lang="en-US" sz="2400" b="1" dirty="0">
                 <a:solidFill>
                   <a:schemeClr val="accent6">
                     <a:lumMod val="60000"/>
@@ -4166,7 +4179,7 @@
               <a:t>given that</a:t>
             </a:r>
             <a:r>
-              <a:rPr lang="en-US" dirty="0">
+              <a:rPr lang="en-US" sz="2400" dirty="0">
                 <a:solidFill>
                   <a:schemeClr val="accent6">
                     <a:lumMod val="60000"/>
@@ -4178,7 +4191,7 @@
             </a:r>
           </a:p>
           <a:p>
-            <a:endParaRPr lang="en-US" dirty="0">
+            <a:endParaRPr lang="en-US" sz="2400" dirty="0">
               <a:solidFill>
                 <a:schemeClr val="accent6">
                   <a:lumMod val="60000"/>
@@ -4189,7 +4202,7 @@
           </a:p>
           <a:p>
             <a:r>
-              <a:rPr lang="en-US" dirty="0">
+              <a:rPr lang="en-US" sz="2400" dirty="0">
                 <a:solidFill>
                   <a:schemeClr val="accent6">
                     <a:lumMod val="60000"/>
@@ -4202,7 +4215,7 @@
           </a:p>
           <a:p>
             <a:r>
-              <a:rPr lang="en-US" dirty="0">
+              <a:rPr lang="en-US" sz="2400" dirty="0">
                 <a:solidFill>
                   <a:schemeClr val="accent6">
                     <a:lumMod val="60000"/>
@@ -4215,7 +4228,7 @@
           </a:p>
           <a:p>
             <a:r>
-              <a:rPr lang="en-US" dirty="0">
+              <a:rPr lang="en-US" sz="2400" dirty="0">
                 <a:solidFill>
                   <a:schemeClr val="accent6">
                     <a:lumMod val="60000"/>
@@ -4227,7 +4240,7 @@
             </a:r>
           </a:p>
           <a:p>
-            <a:endParaRPr lang="en-US" dirty="0">
+            <a:endParaRPr lang="en-US" sz="2400" dirty="0">
               <a:solidFill>
                 <a:schemeClr val="accent6">
                   <a:lumMod val="60000"/>
@@ -8261,45 +8274,8 @@
           <a:chExt cx="0" cy="0"/>
         </a:xfrm>
       </p:grpSpPr>
-      <p:sp>
-        <p:nvSpPr>
-          <p:cNvPr id="2" name="Title 1">
-            <a:extLst>
-              <a:ext uri="{FF2B5EF4-FFF2-40B4-BE49-F238E27FC236}">
-                <a16:creationId xmlns:a16="http://schemas.microsoft.com/office/drawing/2014/main" id="{40522835-7CCE-54FE-89DF-34BFA3DAE394}"/>
-              </a:ext>
-            </a:extLst>
-          </p:cNvPr>
-          <p:cNvSpPr>
-            <a:spLocks noGrp="1"/>
-          </p:cNvSpPr>
-          <p:nvPr>
-            <p:ph type="title"/>
-          </p:nvPr>
-        </p:nvSpPr>
-        <p:spPr>
-          <a:xfrm>
-            <a:off x="838200" y="192849"/>
-            <a:ext cx="10515600" cy="575777"/>
-          </a:xfrm>
-        </p:spPr>
-        <p:txBody>
-          <a:bodyPr>
-            <a:normAutofit fontScale="90000"/>
-          </a:bodyPr>
-          <a:lstStyle/>
-          <a:p>
-            <a:pPr algn="ctr"/>
-            <a:r>
-              <a:rPr lang="en-US" b="1" dirty="0"/>
-              <a:t>Conditional Probability</a:t>
-            </a:r>
-            <a:endParaRPr lang="en-US" dirty="0"/>
-          </a:p>
-        </p:txBody>
-      </p:sp>
-      <mc:AlternateContent xmlns:mc="http://schemas.openxmlformats.org/markup-compatibility/2006" xmlns:a14="http://schemas.microsoft.com/office/drawing/2010/main">
-        <mc:Choice Requires="a14">
+      <mc:AlternateContent xmlns:mc="http://schemas.openxmlformats.org/markup-compatibility/2006">
+        <mc:Choice xmlns:a14="http://schemas.microsoft.com/office/drawing/2010/main" Requires="a14">
           <p:sp>
             <p:nvSpPr>
               <p:cNvPr id="9" name="TextBox 8">
@@ -8314,8 +8290,8 @@
             </p:nvSpPr>
             <p:spPr>
               <a:xfrm>
-                <a:off x="265176" y="880700"/>
-                <a:ext cx="8951976" cy="5909310"/>
+                <a:off x="56930" y="102725"/>
+                <a:ext cx="8951976" cy="6863417"/>
               </a:xfrm>
               <a:prstGeom prst="rect">
                 <a:avLst/>
@@ -8329,7 +8305,7 @@
               <a:lstStyle/>
               <a:p>
                 <a:r>
-                  <a:rPr lang="en-US" b="1" dirty="0">
+                  <a:rPr lang="en-US" sz="2000" b="1" dirty="0">
                     <a:solidFill>
                       <a:schemeClr val="accent6">
                         <a:lumMod val="60000"/>
@@ -8340,7 +8316,7 @@
                   <a:t>Problem</a:t>
                 </a:r>
                 <a:r>
-                  <a:rPr lang="en-US" dirty="0">
+                  <a:rPr lang="en-US" sz="2000" dirty="0">
                     <a:solidFill>
                       <a:schemeClr val="accent6">
                         <a:lumMod val="60000"/>
@@ -8353,7 +8329,7 @@
               </a:p>
               <a:p>
                 <a:r>
-                  <a:rPr lang="en-US" dirty="0">
+                  <a:rPr lang="en-US" sz="2000" dirty="0">
                     <a:solidFill>
                       <a:schemeClr val="accent6">
                         <a:lumMod val="60000"/>
@@ -8366,7 +8342,7 @@
               </a:p>
               <a:p>
                 <a:r>
-                  <a:rPr lang="en-US" dirty="0">
+                  <a:rPr lang="en-US" sz="2000" dirty="0">
                     <a:solidFill>
                       <a:schemeClr val="accent6">
                         <a:lumMod val="60000"/>
@@ -8377,7 +8353,7 @@
                   <a:t>2) what is the probability of rolling a 5, </a:t>
                 </a:r>
                 <a:r>
-                  <a:rPr lang="en-US" b="1" dirty="0">
+                  <a:rPr lang="en-US" sz="2000" b="1" dirty="0">
                     <a:solidFill>
                       <a:schemeClr val="accent6">
                         <a:lumMod val="60000"/>
@@ -8388,7 +8364,7 @@
                   <a:t>given that</a:t>
                 </a:r>
                 <a:r>
-                  <a:rPr lang="en-US" dirty="0">
+                  <a:rPr lang="en-US" sz="2000" dirty="0">
                     <a:solidFill>
                       <a:schemeClr val="accent6">
                         <a:lumMod val="60000"/>
@@ -8400,7 +8376,7 @@
                 </a:r>
               </a:p>
               <a:p>
-                <a:endParaRPr lang="en-US" dirty="0">
+                <a:endParaRPr lang="en-US" sz="2000" dirty="0">
                   <a:solidFill>
                     <a:schemeClr val="accent6">
                       <a:lumMod val="60000"/>
@@ -8411,7 +8387,7 @@
               </a:p>
               <a:p>
                 <a:r>
-                  <a:rPr lang="en-US" dirty="0">
+                  <a:rPr lang="en-US" sz="2000" dirty="0">
                     <a:solidFill>
                       <a:schemeClr val="accent6">
                         <a:lumMod val="60000"/>
@@ -8427,7 +8403,7 @@
                       <m:rPr>
                         <m:sty m:val="p"/>
                       </m:rPr>
-                      <a:rPr lang="en-US">
+                      <a:rPr lang="en-US" sz="2000">
                         <a:solidFill>
                           <a:schemeClr val="accent6">
                             <a:lumMod val="60000"/>
@@ -8441,7 +8417,7 @@
                   </m:oMath>
                 </a14:m>
                 <a:r>
-                  <a:rPr lang="en-US" dirty="0">
+                  <a:rPr lang="en-US" sz="2000" dirty="0">
                     <a:solidFill>
                       <a:schemeClr val="accent6">
                         <a:lumMod val="60000"/>
@@ -8454,7 +8430,7 @@
               </a:p>
               <a:p>
                 <a:r>
-                  <a:rPr lang="en-US" dirty="0">
+                  <a:rPr lang="en-US" sz="2000" dirty="0">
                     <a:solidFill>
                       <a:schemeClr val="accent6">
                         <a:lumMod val="60000"/>
@@ -8467,7 +8443,7 @@
               </a:p>
               <a:p>
                 <a:r>
-                  <a:rPr lang="en-US" dirty="0">
+                  <a:rPr lang="en-US" sz="2000" dirty="0">
                     <a:solidFill>
                       <a:schemeClr val="accent6">
                         <a:lumMod val="60000"/>
@@ -8479,7 +8455,7 @@
                 </a:r>
               </a:p>
               <a:p>
-                <a:endParaRPr lang="en-US" dirty="0">
+                <a:endParaRPr lang="en-US" sz="2000" dirty="0">
                   <a:solidFill>
                     <a:schemeClr val="accent6">
                       <a:lumMod val="60000"/>
@@ -8490,7 +8466,7 @@
               </a:p>
               <a:p>
                 <a:r>
-                  <a:rPr lang="en-US" dirty="0">
+                  <a:rPr lang="en-US" sz="2000" dirty="0">
                     <a:solidFill>
                       <a:schemeClr val="accent6">
                         <a:lumMod val="60000"/>
@@ -8501,7 +8477,7 @@
                   <a:t>2) Now we are given an additional </a:t>
                 </a:r>
                 <a:r>
-                  <a:rPr lang="en-US" b="1" dirty="0">
+                  <a:rPr lang="en-US" sz="2000" b="1" dirty="0">
                     <a:solidFill>
                       <a:schemeClr val="accent6">
                         <a:lumMod val="60000"/>
@@ -8512,7 +8488,7 @@
                   <a:t>evidence</a:t>
                 </a:r>
                 <a:r>
-                  <a:rPr lang="en-US" dirty="0">
+                  <a:rPr lang="en-US" sz="2000" dirty="0">
                     <a:solidFill>
                       <a:schemeClr val="accent6">
                         <a:lumMod val="60000"/>
@@ -8525,7 +8501,7 @@
               </a:p>
               <a:p>
                 <a:r>
-                  <a:rPr lang="en-US" dirty="0">
+                  <a:rPr lang="en-US" sz="2000" dirty="0">
                     <a:solidFill>
                       <a:schemeClr val="accent6">
                         <a:lumMod val="60000"/>
@@ -8537,7 +8513,7 @@
                 </a:r>
               </a:p>
               <a:p>
-                <a:endParaRPr lang="en-US" dirty="0">
+                <a:endParaRPr lang="en-US" sz="2000" dirty="0">
                   <a:solidFill>
                     <a:schemeClr val="accent6">
                       <a:lumMod val="60000"/>
@@ -8548,7 +8524,7 @@
               </a:p>
               <a:p>
                 <a:r>
-                  <a:rPr lang="en-US" dirty="0">
+                  <a:rPr lang="en-US" sz="2000" dirty="0">
                     <a:solidFill>
                       <a:schemeClr val="accent6">
                         <a:lumMod val="60000"/>
@@ -8561,7 +8537,7 @@
               </a:p>
               <a:p>
                 <a:r>
-                  <a:rPr lang="en-US" dirty="0">
+                  <a:rPr lang="en-US" sz="2000" dirty="0">
                     <a:solidFill>
                       <a:schemeClr val="accent6">
                         <a:lumMod val="60000"/>
@@ -8574,7 +8550,7 @@
               </a:p>
               <a:p>
                 <a:r>
-                  <a:rPr lang="en-US" dirty="0">
+                  <a:rPr lang="en-US" sz="2000" dirty="0">
                     <a:solidFill>
                       <a:schemeClr val="accent6">
                         <a:lumMod val="60000"/>
@@ -8586,7 +8562,7 @@
                 </a:r>
               </a:p>
               <a:p>
-                <a:endParaRPr lang="en-US" dirty="0">
+                <a:endParaRPr lang="en-US" sz="2000" dirty="0">
                   <a:solidFill>
                     <a:schemeClr val="accent6">
                       <a:lumMod val="60000"/>
@@ -8596,7 +8572,7 @@
                 </a:endParaRPr>
               </a:p>
               <a:p>
-                <a:endParaRPr lang="en-US" dirty="0">
+                <a:endParaRPr lang="en-US" sz="2000" dirty="0">
                   <a:solidFill>
                     <a:schemeClr val="accent6">
                       <a:lumMod val="60000"/>
@@ -8607,7 +8583,7 @@
               </a:p>
               <a:p>
                 <a:r>
-                  <a:rPr lang="en-US" dirty="0">
+                  <a:rPr lang="en-US" sz="2000" dirty="0">
                     <a:solidFill>
                       <a:schemeClr val="accent6">
                         <a:lumMod val="60000"/>
@@ -8619,7 +8595,7 @@
                 </a:r>
               </a:p>
               <a:p>
-                <a:endParaRPr lang="en-US" dirty="0">
+                <a:endParaRPr lang="en-US" sz="2000" dirty="0">
                   <a:solidFill>
                     <a:schemeClr val="accent6">
                       <a:lumMod val="60000"/>
@@ -8630,7 +8606,7 @@
               </a:p>
               <a:p>
                 <a:r>
-                  <a:rPr lang="en-US" dirty="0">
+                  <a:rPr lang="en-US" sz="2000" dirty="0">
                     <a:solidFill>
                       <a:schemeClr val="accent6">
                         <a:lumMod val="60000"/>
@@ -8644,7 +8620,7 @@
             </p:txBody>
           </p:sp>
         </mc:Choice>
-        <mc:Fallback xmlns="">
+        <mc:Fallback>
           <p:sp>
             <p:nvSpPr>
               <p:cNvPr id="9" name="TextBox 8">
@@ -8661,8 +8637,8 @@
             </p:nvSpPr>
             <p:spPr>
               <a:xfrm>
-                <a:off x="265176" y="880700"/>
-                <a:ext cx="8951976" cy="5909310"/>
+                <a:off x="56930" y="102725"/>
+                <a:ext cx="8951976" cy="6863417"/>
               </a:xfrm>
               <a:prstGeom prst="rect">
                 <a:avLst/>
@@ -8670,7 +8646,7 @@
               <a:blipFill>
                 <a:blip r:embed="rId2"/>
                 <a:stretch>
-                  <a:fillRect l="-613" t="-515" b="-619"/>
+                  <a:fillRect l="-681" t="-533" r="-953" b="-622"/>
                 </a:stretch>
               </a:blipFill>
             </p:spPr>
@@ -10417,7 +10393,43 @@
                         </a:solidFill>
                         <a:latin typeface="Cambria Math" panose="02040503050406030204" pitchFamily="18" charset="0"/>
                       </a:rPr>
-                      <m:t>&lt;0.5</m:t>
+                      <m:t>&lt;</m:t>
+                    </m:r>
+                    <m:r>
+                      <a:rPr lang="en-US" sz="1600">
+                        <a:solidFill>
+                          <a:schemeClr val="accent6">
+                            <a:lumMod val="60000"/>
+                            <a:lumOff val="40000"/>
+                          </a:schemeClr>
+                        </a:solidFill>
+                        <a:latin typeface="Cambria Math" panose="02040503050406030204" pitchFamily="18" charset="0"/>
+                      </a:rPr>
+                      <m:t>0</m:t>
+                    </m:r>
+                    <m:r>
+                      <a:rPr lang="en-US" sz="1600">
+                        <a:solidFill>
+                          <a:schemeClr val="accent6">
+                            <a:lumMod val="60000"/>
+                            <a:lumOff val="40000"/>
+                          </a:schemeClr>
+                        </a:solidFill>
+                        <a:latin typeface="Cambria Math" panose="02040503050406030204" pitchFamily="18" charset="0"/>
+                      </a:rPr>
+                      <m:t>.</m:t>
+                    </m:r>
+                    <m:r>
+                      <a:rPr lang="en-US" sz="1600">
+                        <a:solidFill>
+                          <a:schemeClr val="accent6">
+                            <a:lumMod val="60000"/>
+                            <a:lumOff val="40000"/>
+                          </a:schemeClr>
+                        </a:solidFill>
+                        <a:latin typeface="Cambria Math" panose="02040503050406030204" pitchFamily="18" charset="0"/>
+                      </a:rPr>
+                      <m:t>5</m:t>
                     </m:r>
                   </m:oMath>
                 </a14:m>
@@ -10456,7 +10468,43 @@
                         </a:solidFill>
                         <a:latin typeface="Cambria Math" panose="02040503050406030204" pitchFamily="18" charset="0"/>
                       </a:rPr>
-                      <m:t>&lt;0.5</m:t>
+                      <m:t>&lt;</m:t>
+                    </m:r>
+                    <m:r>
+                      <a:rPr lang="en-US" sz="1600">
+                        <a:solidFill>
+                          <a:schemeClr val="accent6">
+                            <a:lumMod val="60000"/>
+                            <a:lumOff val="40000"/>
+                          </a:schemeClr>
+                        </a:solidFill>
+                        <a:latin typeface="Cambria Math" panose="02040503050406030204" pitchFamily="18" charset="0"/>
+                      </a:rPr>
+                      <m:t>0</m:t>
+                    </m:r>
+                    <m:r>
+                      <a:rPr lang="en-US" sz="1600">
+                        <a:solidFill>
+                          <a:schemeClr val="accent6">
+                            <a:lumMod val="60000"/>
+                            <a:lumOff val="40000"/>
+                          </a:schemeClr>
+                        </a:solidFill>
+                        <a:latin typeface="Cambria Math" panose="02040503050406030204" pitchFamily="18" charset="0"/>
+                      </a:rPr>
+                      <m:t>.</m:t>
+                    </m:r>
+                    <m:r>
+                      <a:rPr lang="en-US" sz="1600">
+                        <a:solidFill>
+                          <a:schemeClr val="accent6">
+                            <a:lumMod val="60000"/>
+                            <a:lumOff val="40000"/>
+                          </a:schemeClr>
+                        </a:solidFill>
+                        <a:latin typeface="Cambria Math" panose="02040503050406030204" pitchFamily="18" charset="0"/>
+                      </a:rPr>
+                      <m:t>5</m:t>
                     </m:r>
                   </m:oMath>
                 </a14:m>
@@ -10530,7 +10578,43 @@
                         </a:solidFill>
                         <a:latin typeface="Cambria Math" panose="02040503050406030204" pitchFamily="18" charset="0"/>
                       </a:rPr>
-                      <m:t>&lt;0.5</m:t>
+                      <m:t>&lt;</m:t>
+                    </m:r>
+                    <m:r>
+                      <a:rPr lang="en-US" sz="1600">
+                        <a:solidFill>
+                          <a:schemeClr val="accent6">
+                            <a:lumMod val="60000"/>
+                            <a:lumOff val="40000"/>
+                          </a:schemeClr>
+                        </a:solidFill>
+                        <a:latin typeface="Cambria Math" panose="02040503050406030204" pitchFamily="18" charset="0"/>
+                      </a:rPr>
+                      <m:t>0</m:t>
+                    </m:r>
+                    <m:r>
+                      <a:rPr lang="en-US" sz="1600">
+                        <a:solidFill>
+                          <a:schemeClr val="accent6">
+                            <a:lumMod val="60000"/>
+                            <a:lumOff val="40000"/>
+                          </a:schemeClr>
+                        </a:solidFill>
+                        <a:latin typeface="Cambria Math" panose="02040503050406030204" pitchFamily="18" charset="0"/>
+                      </a:rPr>
+                      <m:t>.</m:t>
+                    </m:r>
+                    <m:r>
+                      <a:rPr lang="en-US" sz="1600">
+                        <a:solidFill>
+                          <a:schemeClr val="accent6">
+                            <a:lumMod val="60000"/>
+                            <a:lumOff val="40000"/>
+                          </a:schemeClr>
+                        </a:solidFill>
+                        <a:latin typeface="Cambria Math" panose="02040503050406030204" pitchFamily="18" charset="0"/>
+                      </a:rPr>
+                      <m:t>5</m:t>
                     </m:r>
                   </m:oMath>
                 </a14:m>
@@ -10569,7 +10653,43 @@
                         </a:solidFill>
                         <a:latin typeface="Cambria Math" panose="02040503050406030204" pitchFamily="18" charset="0"/>
                       </a:rPr>
-                      <m:t>&lt;0.5</m:t>
+                      <m:t>&lt;</m:t>
+                    </m:r>
+                    <m:r>
+                      <a:rPr lang="en-US" sz="1600">
+                        <a:solidFill>
+                          <a:schemeClr val="accent6">
+                            <a:lumMod val="60000"/>
+                            <a:lumOff val="40000"/>
+                          </a:schemeClr>
+                        </a:solidFill>
+                        <a:latin typeface="Cambria Math" panose="02040503050406030204" pitchFamily="18" charset="0"/>
+                      </a:rPr>
+                      <m:t>0</m:t>
+                    </m:r>
+                    <m:r>
+                      <a:rPr lang="en-US" sz="1600">
+                        <a:solidFill>
+                          <a:schemeClr val="accent6">
+                            <a:lumMod val="60000"/>
+                            <a:lumOff val="40000"/>
+                          </a:schemeClr>
+                        </a:solidFill>
+                        <a:latin typeface="Cambria Math" panose="02040503050406030204" pitchFamily="18" charset="0"/>
+                      </a:rPr>
+                      <m:t>.</m:t>
+                    </m:r>
+                    <m:r>
+                      <a:rPr lang="en-US" sz="1600">
+                        <a:solidFill>
+                          <a:schemeClr val="accent6">
+                            <a:lumMod val="60000"/>
+                            <a:lumOff val="40000"/>
+                          </a:schemeClr>
+                        </a:solidFill>
+                        <a:latin typeface="Cambria Math" panose="02040503050406030204" pitchFamily="18" charset="0"/>
+                      </a:rPr>
+                      <m:t>5</m:t>
                     </m:r>
                   </m:oMath>
                 </a14:m>
@@ -11016,7 +11136,22 @@
                             </a:solidFill>
                             <a:latin typeface="Cambria Math" panose="02040503050406030204" pitchFamily="18" charset="0"/>
                           </a:rPr>
-                          <m:t> 0.5</m:t>
+                          <m:t> </m:t>
+                        </m:r>
+                        <m:r>
+                          <m:rPr>
+                            <m:nor/>
+                          </m:rPr>
+                          <a:rPr lang="en-US" sz="1600" b="0" i="0" smtClean="0">
+                            <a:solidFill>
+                              <a:schemeClr val="accent6">
+                                <a:lumMod val="60000"/>
+                                <a:lumOff val="40000"/>
+                              </a:schemeClr>
+                            </a:solidFill>
+                            <a:latin typeface="Cambria Math" panose="02040503050406030204" pitchFamily="18" charset="0"/>
+                          </a:rPr>
+                          <m:t>0.5</m:t>
                         </m:r>
                       </m:num>
                       <m:den>
@@ -11439,7 +11574,37 @@
                               </a:solidFill>
                               <a:latin typeface="Cambria Math" panose="02040503050406030204" pitchFamily="18" charset="0"/>
                             </a:rPr>
-                            <m:t>0.5</m:t>
+                            <m:t>0</m:t>
+                          </m:r>
+                          <m:r>
+                            <m:rPr>
+                              <m:nor/>
+                            </m:rPr>
+                            <a:rPr lang="en-US" sz="1600">
+                              <a:solidFill>
+                                <a:schemeClr val="accent6">
+                                  <a:lumMod val="60000"/>
+                                  <a:lumOff val="40000"/>
+                                </a:schemeClr>
+                              </a:solidFill>
+                              <a:latin typeface="Cambria Math" panose="02040503050406030204" pitchFamily="18" charset="0"/>
+                            </a:rPr>
+                            <m:t>.</m:t>
+                          </m:r>
+                          <m:r>
+                            <m:rPr>
+                              <m:nor/>
+                            </m:rPr>
+                            <a:rPr lang="en-US" sz="1600">
+                              <a:solidFill>
+                                <a:schemeClr val="accent6">
+                                  <a:lumMod val="60000"/>
+                                  <a:lumOff val="40000"/>
+                                </a:schemeClr>
+                              </a:solidFill>
+                              <a:latin typeface="Cambria Math" panose="02040503050406030204" pitchFamily="18" charset="0"/>
+                            </a:rPr>
+                            <m:t>5</m:t>
                           </m:r>
                           <m:r>
                             <m:rPr>
@@ -11481,7 +11646,49 @@
                                 </a:schemeClr>
                               </a:solidFill>
                             </a:rPr>
-                            <m:t> 0.5 </m:t>
+                            <m:t> </m:t>
+                          </m:r>
+                          <m:r>
+                            <m:rPr>
+                              <m:nor/>
+                            </m:rPr>
+                            <a:rPr lang="en-US" sz="1600" dirty="0">
+                              <a:solidFill>
+                                <a:schemeClr val="accent6">
+                                  <a:lumMod val="60000"/>
+                                  <a:lumOff val="40000"/>
+                                </a:schemeClr>
+                              </a:solidFill>
+                            </a:rPr>
+                            <m:t>0</m:t>
+                          </m:r>
+                          <m:r>
+                            <m:rPr>
+                              <m:nor/>
+                            </m:rPr>
+                            <a:rPr lang="en-US" sz="1600" dirty="0">
+                              <a:solidFill>
+                                <a:schemeClr val="accent6">
+                                  <a:lumMod val="60000"/>
+                                  <a:lumOff val="40000"/>
+                                </a:schemeClr>
+                              </a:solidFill>
+                            </a:rPr>
+                            <m:t>.</m:t>
+                          </m:r>
+                          <m:r>
+                            <m:rPr>
+                              <m:nor/>
+                            </m:rPr>
+                            <a:rPr lang="en-US" sz="1600" dirty="0">
+                              <a:solidFill>
+                                <a:schemeClr val="accent6">
+                                  <a:lumMod val="60000"/>
+                                  <a:lumOff val="40000"/>
+                                </a:schemeClr>
+                              </a:solidFill>
+                            </a:rPr>
+                            <m:t>5 </m:t>
                           </m:r>
                           <m:r>
                             <m:rPr>
@@ -11509,7 +11716,49 @@
                                 </a:schemeClr>
                               </a:solidFill>
                             </a:rPr>
-                            <m:t> 0.5</m:t>
+                            <m:t> </m:t>
+                          </m:r>
+                          <m:r>
+                            <m:rPr>
+                              <m:nor/>
+                            </m:rPr>
+                            <a:rPr lang="en-US" sz="1600" dirty="0">
+                              <a:solidFill>
+                                <a:schemeClr val="accent6">
+                                  <a:lumMod val="60000"/>
+                                  <a:lumOff val="40000"/>
+                                </a:schemeClr>
+                              </a:solidFill>
+                            </a:rPr>
+                            <m:t>0</m:t>
+                          </m:r>
+                          <m:r>
+                            <m:rPr>
+                              <m:nor/>
+                            </m:rPr>
+                            <a:rPr lang="en-US" sz="1600" dirty="0">
+                              <a:solidFill>
+                                <a:schemeClr val="accent6">
+                                  <a:lumMod val="60000"/>
+                                  <a:lumOff val="40000"/>
+                                </a:schemeClr>
+                              </a:solidFill>
+                            </a:rPr>
+                            <m:t>.</m:t>
+                          </m:r>
+                          <m:r>
+                            <m:rPr>
+                              <m:nor/>
+                            </m:rPr>
+                            <a:rPr lang="en-US" sz="1600" dirty="0">
+                              <a:solidFill>
+                                <a:schemeClr val="accent6">
+                                  <a:lumMod val="60000"/>
+                                  <a:lumOff val="40000"/>
+                                </a:schemeClr>
+                              </a:solidFill>
+                            </a:rPr>
+                            <m:t>5</m:t>
                           </m:r>
                         </m:num>
                         <m:den>
@@ -11552,7 +11801,31 @@
                           </a:solidFill>
                           <a:latin typeface="Cambria Math" panose="02040503050406030204" pitchFamily="18" charset="0"/>
                         </a:rPr>
-                        <m:t>0.125</m:t>
+                        <m:t>0</m:t>
+                      </m:r>
+                      <m:r>
+                        <a:rPr lang="en-US" sz="1600">
+                          <a:solidFill>
+                            <a:schemeClr val="accent6">
+                              <a:lumMod val="60000"/>
+                              <a:lumOff val="40000"/>
+                            </a:schemeClr>
+                          </a:solidFill>
+                          <a:latin typeface="Cambria Math" panose="02040503050406030204" pitchFamily="18" charset="0"/>
+                        </a:rPr>
+                        <m:t>.</m:t>
+                      </m:r>
+                      <m:r>
+                        <a:rPr lang="en-US" sz="1600">
+                          <a:solidFill>
+                            <a:schemeClr val="accent6">
+                              <a:lumMod val="60000"/>
+                              <a:lumOff val="40000"/>
+                            </a:schemeClr>
+                          </a:solidFill>
+                          <a:latin typeface="Cambria Math" panose="02040503050406030204" pitchFamily="18" charset="0"/>
+                        </a:rPr>
+                        <m:t>125</m:t>
                       </m:r>
                     </m:oMath>
                   </m:oMathPara>
@@ -11865,7 +12138,37 @@
                               </a:solidFill>
                               <a:latin typeface="Cambria Math" panose="02040503050406030204" pitchFamily="18" charset="0"/>
                             </a:rPr>
-                            <m:t>0.5</m:t>
+                            <m:t>0</m:t>
+                          </m:r>
+                          <m:r>
+                            <m:rPr>
+                              <m:nor/>
+                            </m:rPr>
+                            <a:rPr lang="en-US" sz="1600" b="0" i="0" smtClean="0">
+                              <a:solidFill>
+                                <a:schemeClr val="accent6">
+                                  <a:lumMod val="60000"/>
+                                  <a:lumOff val="40000"/>
+                                </a:schemeClr>
+                              </a:solidFill>
+                              <a:latin typeface="Cambria Math" panose="02040503050406030204" pitchFamily="18" charset="0"/>
+                            </a:rPr>
+                            <m:t>.</m:t>
+                          </m:r>
+                          <m:r>
+                            <m:rPr>
+                              <m:nor/>
+                            </m:rPr>
+                            <a:rPr lang="en-US" sz="1600" b="0" i="0" smtClean="0">
+                              <a:solidFill>
+                                <a:schemeClr val="accent6">
+                                  <a:lumMod val="60000"/>
+                                  <a:lumOff val="40000"/>
+                                </a:schemeClr>
+                              </a:solidFill>
+                              <a:latin typeface="Cambria Math" panose="02040503050406030204" pitchFamily="18" charset="0"/>
+                            </a:rPr>
+                            <m:t>5</m:t>
                           </m:r>
                         </m:num>
                         <m:den>
@@ -11908,7 +12211,19 @@
                           </a:solidFill>
                           <a:latin typeface="Cambria Math" panose="02040503050406030204" pitchFamily="18" charset="0"/>
                         </a:rPr>
-                        <m:t>0.</m:t>
+                        <m:t>0</m:t>
+                      </m:r>
+                      <m:r>
+                        <a:rPr lang="en-US" sz="1600">
+                          <a:solidFill>
+                            <a:schemeClr val="accent6">
+                              <a:lumMod val="60000"/>
+                              <a:lumOff val="40000"/>
+                            </a:schemeClr>
+                          </a:solidFill>
+                          <a:latin typeface="Cambria Math" panose="02040503050406030204" pitchFamily="18" charset="0"/>
+                        </a:rPr>
+                        <m:t>.</m:t>
                       </m:r>
                       <m:r>
                         <a:rPr lang="en-US" sz="1600" b="0" i="0" smtClean="0">
